--- a/LIT_REVIEW_SLIDES.pptx
+++ b/LIT_REVIEW_SLIDES.pptx
@@ -1978,7 +1978,7 @@
           <a:p>
             <a:r>
               <a:rPr lang="en-US" dirty="0"/>
-              <a:t>Direction accuracy is the fairer measure: ours is 51.8%, below the 52.8% you get by always predicting the majority direction.</a:t>
+              <a:t>The honest units are returns. Our forecasts vary by only 10.8 basis points while real next-day returns vary by 245 — the model hedges to near-zero, which is exactly what makes the price numbers look good. Direction accuracy is 51.8%, below the 52.8% you get by always predicting the majority direction.</a:t>
             </a:r>
             <a:endParaRPr lang="en-US" dirty="0"/>
           </a:p>
@@ -3512,7 +3512,7 @@
                 <a:ea typeface="Cambria" pitchFamily="34" charset="-122"/>
                 <a:cs typeface="Cambria" pitchFamily="34" charset="-120"/>
               </a:rPr>
-              <a:t>98.44%</a:t>
+              <a:t>R² 0.0001</a:t>
             </a:r>
             <a:endParaRPr lang="en-US" sz="2800" dirty="0"/>
           </a:p>
@@ -3554,7 +3554,7 @@
                 <a:ea typeface="Calibri" pitchFamily="34" charset="-122"/>
                 <a:cs typeface="Calibri" pitchFamily="34" charset="-120"/>
               </a:rPr>
-              <a:t>price accuracy — but identical to the naive forecast (p = 0.30)</a:t>
+              <a:t>on the next-day return — no better than predicting no change (p = 0.97), though it reads as 98.44% in price units</a:t>
             </a:r>
             <a:endParaRPr lang="en-US" sz="1200" dirty="0"/>
           </a:p>
@@ -5928,7 +5928,7 @@
         <p:spPr>
           <a:xfrm>
             <a:off x="7909560" y="2286000"/>
-            <a:ext cx="3474720" cy="2651760"/>
+            <a:ext cx="3474720" cy="2834640"/>
           </a:xfrm>
           <a:prstGeom prst="rect">
             <a:avLst/>
@@ -5942,16 +5942,16 @@
           <a:p>
             <a:pPr marL="342900" indent="-342900">
               <a:lnSpc>
-                <a:spcPts val="1900"/>
+                <a:spcPts val="1800"/>
               </a:lnSpc>
               <a:spcAft>
-                <a:spcPts val="1000"/>
+                <a:spcPts val="900"/>
               </a:spcAft>
               <a:buSzPct val="100000"/>
               <a:buChar char="•"/>
             </a:pPr>
             <a:r>
-              <a:rPr lang="en-US" sz="1400" dirty="0">
+              <a:rPr lang="en-US" sz="1350" dirty="0">
                 <a:solidFill>
                   <a:srgbClr val="26324A"/>
                 </a:solidFill>
@@ -5961,21 +5961,21 @@
               </a:rPr>
               <a:t>Our Random Forest: 1.560% error, i.e. 98.44% “accuracy”.</a:t>
             </a:r>
-            <a:endParaRPr lang="en-US" sz="1400" dirty="0"/>
+            <a:endParaRPr lang="en-US" sz="1350" dirty="0"/>
           </a:p>
           <a:p>
             <a:pPr marL="342900" indent="-342900">
               <a:lnSpc>
-                <a:spcPts val="1900"/>
+                <a:spcPts val="1800"/>
               </a:lnSpc>
               <a:spcAft>
-                <a:spcPts val="1000"/>
+                <a:spcPts val="900"/>
               </a:spcAft>
               <a:buSzPct val="100000"/>
               <a:buChar char="•"/>
             </a:pPr>
             <a:r>
-              <a:rPr lang="en-US" sz="1400" dirty="0">
+              <a:rPr lang="en-US" sz="1350" dirty="0">
                 <a:solidFill>
                   <a:srgbClr val="26324A"/>
                 </a:solidFill>
@@ -5985,21 +5985,21 @@
               </a:rPr>
               <a:t>The naive forecast: 1.561%. Identical (p = 0.30).</a:t>
             </a:r>
-            <a:endParaRPr lang="en-US" sz="1400" dirty="0"/>
+            <a:endParaRPr lang="en-US" sz="1350" dirty="0"/>
           </a:p>
           <a:p>
             <a:pPr marL="342900" indent="-342900">
               <a:lnSpc>
-                <a:spcPts val="1900"/>
+                <a:spcPts val="1800"/>
               </a:lnSpc>
               <a:spcAft>
-                <a:spcPts val="1000"/>
+                <a:spcPts val="900"/>
               </a:spcAft>
               <a:buSzPct val="100000"/>
               <a:buChar char="•"/>
             </a:pPr>
             <a:r>
-              <a:rPr lang="en-US" sz="1400" dirty="0">
+              <a:rPr lang="en-US" sz="1350" dirty="0">
                 <a:solidFill>
                   <a:srgbClr val="26324A"/>
                 </a:solidFill>
@@ -6007,9 +6007,33 @@
                 <a:ea typeface="Calibri" pitchFamily="34" charset="-122"/>
                 <a:cs typeface="Calibri" pitchFamily="34" charset="-120"/>
               </a:rPr>
+              <a:t>Score the same forecasts on the return instead of the price and R² falls from 0.9994 to +0.00013.</a:t>
+            </a:r>
+            <a:endParaRPr lang="en-US" sz="1350" dirty="0"/>
+          </a:p>
+          <a:p>
+            <a:pPr marL="342900" indent="-342900">
+              <a:lnSpc>
+                <a:spcPts val="1800"/>
+              </a:lnSpc>
+              <a:spcAft>
+                <a:spcPts val="900"/>
+              </a:spcAft>
+              <a:buSzPct val="100000"/>
+              <a:buChar char="•"/>
+            </a:pPr>
+            <a:r>
+              <a:rPr lang="en-US" sz="1350" dirty="0">
+                <a:solidFill>
+                  <a:srgbClr val="26324A"/>
+                </a:solidFill>
+                <a:latin typeface="Calibri" pitchFamily="34" charset="0"/>
+                <a:ea typeface="Calibri" pitchFamily="34" charset="-122"/>
+                <a:cs typeface="Calibri" pitchFamily="34" charset="-120"/>
+              </a:rPr>
               <a:t>A Random Forest on raw prices has R² 0.993 yet is significantly worse than naive.</a:t>
             </a:r>
-            <a:endParaRPr lang="en-US" sz="1400" dirty="0"/>
+            <a:endParaRPr lang="en-US" sz="1350" dirty="0"/>
           </a:p>
         </p:txBody>
       </p:sp>
@@ -6022,7 +6046,7 @@
         <p:spPr>
           <a:xfrm>
             <a:off x="640080" y="5257800"/>
-            <a:ext cx="7315200" cy="365760"/>
+            <a:ext cx="7315200" cy="457200"/>
           </a:xfrm>
           <a:prstGeom prst="rect">
             <a:avLst/>
@@ -6046,7 +6070,7 @@
                 <a:ea typeface="Calibri" pitchFamily="34" charset="-122"/>
                 <a:cs typeface="Calibri" pitchFamily="34" charset="-120"/>
               </a:rPr>
-              <a:t>Lower is better. All four models land within 0.03% of each other.</a:t>
+              <a:t>Lower is better. All four models land within 0.03% of each other — because price-level error measures the price, not the forecast.</a:t>
             </a:r>
             <a:endParaRPr lang="en-US" sz="1200" dirty="0"/>
           </a:p>

--- a/LIT_REVIEW_SLIDES.pptx
+++ b/LIT_REVIEW_SLIDES.pptx
@@ -3862,7 +3862,7 @@
                 <a:ea typeface="Calibri" pitchFamily="34" charset="-122"/>
                 <a:cs typeface="Calibri" pitchFamily="34" charset="-120"/>
               </a:rPr>
-              <a:t>SHAP agrees across random seeds; LIME only ρ 0.48 between runs</a:t>
+              <a:t>SHAP agrees across random seeds; LIME only ρ 0.45 between its own re-runs</a:t>
             </a:r>
             <a:endParaRPr lang="en-US" sz="1200" dirty="0"/>
           </a:p>
